--- a/docs/activities/Exam1.pptx
+++ b/docs/activities/Exam1.pptx
@@ -9,6 +9,7 @@
     <p:sldId id="257" r:id="rId3"/>
     <p:sldId id="258" r:id="rId4"/>
     <p:sldId id="259" r:id="rId5"/>
+    <p:sldId id="260" r:id="rId6"/>
   </p:sldIdLst>
   <p:sldSz cx="9144000" cy="6858000" type="screen4x3"/>
   <p:notesSz cx="6858000" cy="9144000"/>
@@ -3038,6 +3039,207 @@
             <a:r>
               <a:rPr/>
               <a:t> before class and bring it with you.</a:t>
+            </a:r>
+          </a:p>
+        </p:txBody>
+      </p:sp>
+      <p:sp>
+        <p:nvSpPr>
+          <p:cNvPr id="4" name="Slide Number Placeholder 3"/>
+          <p:cNvSpPr>
+            <a:spLocks noGrp="1"/>
+          </p:cNvSpPr>
+          <p:nvPr>
+            <p:ph idx="10" sz="quarter" type="sldNum"/>
+          </p:nvPr>
+        </p:nvSpPr>
+        <p:spPr/>
+        <p:txBody>
+          <a:bodyPr/>
+          <a:lstStyle/>
+          <a:p>
+            <a:fld id="{9C13042B-154E-4D18-B726-07B2F714EFCF}" type="slidenum">
+              <a:rPr lang="en-US" smtClean="0"/>
+              <a:pPr/>
+              <a:t>‹#›</a:t>
+            </a:fld>
+            <a:endParaRPr dirty="0" lang="en-US"/>
+          </a:p>
+        </p:txBody>
+      </p:sp>
+    </p:spTree>
+  </p:cSld>
+  <p:timing>
+    <p:tnLst>
+      <p:par>
+        <p:cTn id="1" dur="indefinite" restart="never" nodeType="tmRoot">
+          <p:childTnLst>
+            <p:seq concurrent="1" nextAc="seek">
+              <p:cTn id="2" dur="indefinite" nodeType="mainSeq">
+                <p:childTnLst>
+                  <p:par>
+                    <p:cTn id="3" fill="hold">
+                      <p:stCondLst>
+                        <p:cond delay="indefinite"/>
+                      </p:stCondLst>
+                      <p:childTnLst>
+                        <p:par>
+                          <p:cTn id="4" fill="hold">
+                            <p:stCondLst>
+                              <p:cond delay="0"/>
+                            </p:stCondLst>
+                            <p:childTnLst>
+                              <p:par>
+                                <p:cTn id="5" presetID="1" presetClass="entr" presetSubtype="0" fill="hold" grpId="0" nodeType="clickEffect">
+                                  <p:stCondLst>
+                                    <p:cond delay="0"/>
+                                  </p:stCondLst>
+                                  <p:childTnLst>
+                                    <p:set>
+                                      <p:cBhvr>
+                                        <p:cTn id="6" dur="1" fill="hold">
+                                          <p:stCondLst>
+                                            <p:cond delay="0"/>
+                                          </p:stCondLst>
+                                        </p:cTn>
+                                        <p:tgtEl>
+                                          <p:spTgt spid="3">
+                                            <p:txEl>
+                                              <p:pRg st="0" end="0"/>
+                                            </p:txEl>
+                                          </p:spTgt>
+                                        </p:tgtEl>
+                                        <p:attrNameLst>
+                                          <p:attrName>style.visibility</p:attrName>
+                                        </p:attrNameLst>
+                                      </p:cBhvr>
+                                      <p:to>
+                                        <p:strVal val="visible"/>
+                                      </p:to>
+                                    </p:set>
+                                  </p:childTnLst>
+                                </p:cTn>
+                              </p:par>
+                            </p:childTnLst>
+                          </p:cTn>
+                        </p:par>
+                      </p:childTnLst>
+                    </p:cTn>
+                  </p:par>
+                </p:childTnLst>
+              </p:cTn>
+              <p:prevCondLst>
+                <p:cond evt="onPrev" delay="0">
+                  <p:tgtEl>
+                    <p:sldTgt/>
+                  </p:tgtEl>
+                </p:cond>
+              </p:prevCondLst>
+              <p:nextCondLst>
+                <p:cond evt="onNext" delay="0">
+                  <p:tgtEl>
+                    <p:sldTgt/>
+                  </p:tgtEl>
+                </p:cond>
+              </p:nextCondLst>
+            </p:seq>
+          </p:childTnLst>
+        </p:cTn>
+      </p:par>
+    </p:tnLst>
+    <p:bldLst>
+      <p:bldP spid="3" grpId="0" uiExpand="1" build="p"/>
+    </p:bldLst>
+  </p:timing>
+</p:sld>
+</file>
+
+<file path=ppt/slides/slide5.xml><?xml version="1.0" encoding="utf-8"?>
+<p:sld xmlns:a="http://schemas.openxmlformats.org/drawingml/2006/main" xmlns:r="http://schemas.openxmlformats.org/officeDocument/2006/relationships" xmlns:p="http://schemas.openxmlformats.org/presentationml/2006/main">
+  <p:cSld>
+    <p:spTree>
+      <p:nvGrpSpPr>
+        <p:cNvPr id="1" name=""/>
+        <p:cNvGrpSpPr/>
+        <p:nvPr/>
+      </p:nvGrpSpPr>
+      <p:grpSpPr>
+        <a:xfrm>
+          <a:off x="0" y="0"/>
+          <a:ext cx="0" cy="0"/>
+          <a:chOff x="0" y="0"/>
+          <a:chExt cx="0" cy="0"/>
+        </a:xfrm>
+      </p:grpSpPr>
+      <p:sp>
+        <p:nvSpPr>
+          <p:cNvPr id="2" name="Title Placeholder 1"/>
+          <p:cNvSpPr>
+            <a:spLocks noGrp="1"/>
+          </p:cNvSpPr>
+          <p:nvPr>
+            <p:ph type="title"/>
+          </p:nvPr>
+        </p:nvSpPr>
+        <p:spPr bwMode="auto">
+          <a:xfrm>
+            <a:off x="433680" y="423297"/>
+            <a:ext cx="8229600" cy="784602"/>
+          </a:xfrm>
+          <a:prstGeom prst="rect">
+            <a:avLst/>
+          </a:prstGeom>
+          <a:noFill/>
+          <a:ln w="9525">
+            <a:noFill/>
+            <a:miter lim="800000"/>
+            <a:headEnd/>
+            <a:tailEnd/>
+          </a:ln>
+        </p:spPr>
+        <p:txBody>
+          <a:bodyPr/>
+          <a:lstStyle/>
+          <a:p>
+            <a:pPr lvl="0" indent="0" marL="0">
+              <a:buNone/>
+            </a:pPr>
+            <a:r>
+              <a:rPr/>
+              <a:t>Exam 01 Analysis</a:t>
+            </a:r>
+          </a:p>
+        </p:txBody>
+      </p:sp>
+      <p:sp>
+        <p:nvSpPr>
+          <p:cNvPr id="3" name="Text Placeholder 2"/>
+          <p:cNvSpPr>
+            <a:spLocks noGrp="1"/>
+          </p:cNvSpPr>
+          <p:nvPr>
+            <p:ph idx="1"/>
+          </p:nvPr>
+        </p:nvSpPr>
+        <p:spPr/>
+        <p:txBody>
+          <a:bodyPr/>
+          <a:lstStyle/>
+          <a:p>
+            <a:pPr lvl="0"/>
+            <a:r>
+              <a:rPr/>
+              <a:t>Review the </a:t>
+            </a:r>
+            <a:r>
+              <a:rPr>
+                <a:hlinkClick r:id="rId2"/>
+              </a:rPr>
+              <a:t>Exam 1 Report</a:t>
+            </a:r>
+            <a:r>
+              <a:rPr/>
+              <a:t> before the class on Monday.</a:t>
             </a:r>
           </a:p>
         </p:txBody>

--- a/docs/activities/Exam1.pptx
+++ b/docs/activities/Exam1.pptx
@@ -9,7 +9,6 @@
     <p:sldId id="257" r:id="rId3"/>
     <p:sldId id="258" r:id="rId4"/>
     <p:sldId id="259" r:id="rId5"/>
-    <p:sldId id="260" r:id="rId6"/>
   </p:sldIdLst>
   <p:sldSz cx="9144000" cy="6858000" type="screen4x3"/>
   <p:notesSz cx="6858000" cy="9144000"/>
@@ -3039,207 +3038,6 @@
             <a:r>
               <a:rPr/>
               <a:t> before class and bring it with you.</a:t>
-            </a:r>
-          </a:p>
-        </p:txBody>
-      </p:sp>
-      <p:sp>
-        <p:nvSpPr>
-          <p:cNvPr id="4" name="Slide Number Placeholder 3"/>
-          <p:cNvSpPr>
-            <a:spLocks noGrp="1"/>
-          </p:cNvSpPr>
-          <p:nvPr>
-            <p:ph idx="10" sz="quarter" type="sldNum"/>
-          </p:nvPr>
-        </p:nvSpPr>
-        <p:spPr/>
-        <p:txBody>
-          <a:bodyPr/>
-          <a:lstStyle/>
-          <a:p>
-            <a:fld id="{9C13042B-154E-4D18-B726-07B2F714EFCF}" type="slidenum">
-              <a:rPr lang="en-US" smtClean="0"/>
-              <a:pPr/>
-              <a:t>‹#›</a:t>
-            </a:fld>
-            <a:endParaRPr dirty="0" lang="en-US"/>
-          </a:p>
-        </p:txBody>
-      </p:sp>
-    </p:spTree>
-  </p:cSld>
-  <p:timing>
-    <p:tnLst>
-      <p:par>
-        <p:cTn id="1" dur="indefinite" restart="never" nodeType="tmRoot">
-          <p:childTnLst>
-            <p:seq concurrent="1" nextAc="seek">
-              <p:cTn id="2" dur="indefinite" nodeType="mainSeq">
-                <p:childTnLst>
-                  <p:par>
-                    <p:cTn id="3" fill="hold">
-                      <p:stCondLst>
-                        <p:cond delay="indefinite"/>
-                      </p:stCondLst>
-                      <p:childTnLst>
-                        <p:par>
-                          <p:cTn id="4" fill="hold">
-                            <p:stCondLst>
-                              <p:cond delay="0"/>
-                            </p:stCondLst>
-                            <p:childTnLst>
-                              <p:par>
-                                <p:cTn id="5" presetID="1" presetClass="entr" presetSubtype="0" fill="hold" grpId="0" nodeType="clickEffect">
-                                  <p:stCondLst>
-                                    <p:cond delay="0"/>
-                                  </p:stCondLst>
-                                  <p:childTnLst>
-                                    <p:set>
-                                      <p:cBhvr>
-                                        <p:cTn id="6" dur="1" fill="hold">
-                                          <p:stCondLst>
-                                            <p:cond delay="0"/>
-                                          </p:stCondLst>
-                                        </p:cTn>
-                                        <p:tgtEl>
-                                          <p:spTgt spid="3">
-                                            <p:txEl>
-                                              <p:pRg st="0" end="0"/>
-                                            </p:txEl>
-                                          </p:spTgt>
-                                        </p:tgtEl>
-                                        <p:attrNameLst>
-                                          <p:attrName>style.visibility</p:attrName>
-                                        </p:attrNameLst>
-                                      </p:cBhvr>
-                                      <p:to>
-                                        <p:strVal val="visible"/>
-                                      </p:to>
-                                    </p:set>
-                                  </p:childTnLst>
-                                </p:cTn>
-                              </p:par>
-                            </p:childTnLst>
-                          </p:cTn>
-                        </p:par>
-                      </p:childTnLst>
-                    </p:cTn>
-                  </p:par>
-                </p:childTnLst>
-              </p:cTn>
-              <p:prevCondLst>
-                <p:cond evt="onPrev" delay="0">
-                  <p:tgtEl>
-                    <p:sldTgt/>
-                  </p:tgtEl>
-                </p:cond>
-              </p:prevCondLst>
-              <p:nextCondLst>
-                <p:cond evt="onNext" delay="0">
-                  <p:tgtEl>
-                    <p:sldTgt/>
-                  </p:tgtEl>
-                </p:cond>
-              </p:nextCondLst>
-            </p:seq>
-          </p:childTnLst>
-        </p:cTn>
-      </p:par>
-    </p:tnLst>
-    <p:bldLst>
-      <p:bldP spid="3" grpId="0" uiExpand="1" build="p"/>
-    </p:bldLst>
-  </p:timing>
-</p:sld>
-</file>
-
-<file path=ppt/slides/slide5.xml><?xml version="1.0" encoding="utf-8"?>
-<p:sld xmlns:a="http://schemas.openxmlformats.org/drawingml/2006/main" xmlns:r="http://schemas.openxmlformats.org/officeDocument/2006/relationships" xmlns:p="http://schemas.openxmlformats.org/presentationml/2006/main">
-  <p:cSld>
-    <p:spTree>
-      <p:nvGrpSpPr>
-        <p:cNvPr id="1" name=""/>
-        <p:cNvGrpSpPr/>
-        <p:nvPr/>
-      </p:nvGrpSpPr>
-      <p:grpSpPr>
-        <a:xfrm>
-          <a:off x="0" y="0"/>
-          <a:ext cx="0" cy="0"/>
-          <a:chOff x="0" y="0"/>
-          <a:chExt cx="0" cy="0"/>
-        </a:xfrm>
-      </p:grpSpPr>
-      <p:sp>
-        <p:nvSpPr>
-          <p:cNvPr id="2" name="Title Placeholder 1"/>
-          <p:cNvSpPr>
-            <a:spLocks noGrp="1"/>
-          </p:cNvSpPr>
-          <p:nvPr>
-            <p:ph type="title"/>
-          </p:nvPr>
-        </p:nvSpPr>
-        <p:spPr bwMode="auto">
-          <a:xfrm>
-            <a:off x="433680" y="423297"/>
-            <a:ext cx="8229600" cy="784602"/>
-          </a:xfrm>
-          <a:prstGeom prst="rect">
-            <a:avLst/>
-          </a:prstGeom>
-          <a:noFill/>
-          <a:ln w="9525">
-            <a:noFill/>
-            <a:miter lim="800000"/>
-            <a:headEnd/>
-            <a:tailEnd/>
-          </a:ln>
-        </p:spPr>
-        <p:txBody>
-          <a:bodyPr/>
-          <a:lstStyle/>
-          <a:p>
-            <a:pPr lvl="0" indent="0" marL="0">
-              <a:buNone/>
-            </a:pPr>
-            <a:r>
-              <a:rPr/>
-              <a:t>Exam 01 Analysis</a:t>
-            </a:r>
-          </a:p>
-        </p:txBody>
-      </p:sp>
-      <p:sp>
-        <p:nvSpPr>
-          <p:cNvPr id="3" name="Text Placeholder 2"/>
-          <p:cNvSpPr>
-            <a:spLocks noGrp="1"/>
-          </p:cNvSpPr>
-          <p:nvPr>
-            <p:ph idx="1"/>
-          </p:nvPr>
-        </p:nvSpPr>
-        <p:spPr/>
-        <p:txBody>
-          <a:bodyPr/>
-          <a:lstStyle/>
-          <a:p>
-            <a:pPr lvl="0"/>
-            <a:r>
-              <a:rPr/>
-              <a:t>Review the </a:t>
-            </a:r>
-            <a:r>
-              <a:rPr>
-                <a:hlinkClick r:id="rId2"/>
-              </a:rPr>
-              <a:t>Exam 1 Report</a:t>
-            </a:r>
-            <a:r>
-              <a:rPr/>
-              <a:t> before the class on Monday.</a:t>
             </a:r>
           </a:p>
         </p:txBody>
